--- a/Pivot-into-Tech-Facilitator-Deck.pptx
+++ b/Pivot-into-Tech-Facilitator-Deck.pptx
@@ -1496,7 +1496,7 @@
           <a:p>
             <a:r>
               <a:rPr lang="en-US" dirty="0"/>
-              <a:t>Self-paced. Say almost nothing. Helpers walk the room. Stop at the planned end even if people are enjoying it. One minute warning. Ask two people what they liked and applaud.</a:t>
+              <a:t>MindForge is the starter for the whole afternoon and sits outside this session. Leave this slide up while people arrive and settle. Say almost nothing. Helpers walk the room. When you are ready to begin the block, thank people for playing and move on.</a:t>
             </a:r>
             <a:endParaRPr lang="en-US" dirty="0"/>
           </a:p>
@@ -2376,7 +2376,7 @@
           <a:p>
             <a:r>
               <a:rPr lang="en-US" dirty="0"/>
-              <a:t>Core timings. In Full mode the Vault starts at 00:45 and Compound Click at 01:22. In Express mode the Vault starts at 00:22 and Compound Click at 00:50. The Facilitator Desk has live times for every mode.</a:t>
+              <a:t>Core timings, counted from the start of this block (after the MindForge starter). In Full mode LoomSTEM starts at 00:04, the Vault at 00:32 and Compound Click at 01:09. In Express mode LoomSTEM starts at 00:02, the Vault at 00:17 and Compound Click at 00:45. The Facilitator Desk has live times for every mode.</a:t>
             </a:r>
             <a:endParaRPr lang="en-US" dirty="0"/>
           </a:p>
@@ -3324,7 +3324,7 @@
         <p:spPr>
           <a:xfrm>
             <a:off x="812780" y="6273643"/>
-            <a:ext cx="4819926" cy="177796"/>
+            <a:ext cx="6926026" cy="177796"/>
           </a:xfrm>
           <a:prstGeom prst="rect">
             <a:avLst/>
@@ -3351,7 +3351,7 @@
                 <a:ea typeface="Arial" pitchFamily="34" charset="-122"/>
                 <a:cs typeface="Arial" pitchFamily="34" charset="-120"/>
               </a:rPr>
-              <a:t>Leave this up as people arrive. Core session, about 90 minutes.</a:t>
+              <a:t>Leave this up as people arrive. Core session, about 80 minutes, after the MindForge starter.</a:t>
             </a:r>
             <a:endParaRPr lang="en-US" sz="1200" dirty="0"/>
           </a:p>
@@ -7802,7 +7802,7 @@
                 <a:ea typeface="Arial" pitchFamily="34" charset="-122"/>
                 <a:cs typeface="Arial" pitchFamily="34" charset="-120"/>
               </a:rPr>
-              <a:t>00:00 · ARRIVE AND WARM UP</a:t>
+              <a:t>AFTERNOON STARTER · OPEN ALL AFTERNOON</a:t>
             </a:r>
             <a:endParaRPr lang="en-US" sz="1400" dirty="0"/>
           </a:p>
@@ -7817,16 +7817,16 @@
         <p:spPr>
           <a:xfrm>
             <a:off x="812780" y="1295368"/>
-            <a:ext cx="10935951" cy="1280088"/>
-          </a:xfrm>
-          <a:prstGeom prst="rect">
-            <a:avLst/>
-          </a:prstGeom>
-          <a:noFill/>
-          <a:ln/>
-        </p:spPr>
-        <p:txBody>
-          <a:bodyPr wrap="square" lIns="0" tIns="0" rIns="0" bIns="0" rtlCol="0" anchor="t"/>
+            <a:ext cx="11834072" cy="640044"/>
+          </a:xfrm>
+          <a:prstGeom prst="rect">
+            <a:avLst/>
+          </a:prstGeom>
+          <a:noFill/>
+          <a:ln/>
+        </p:spPr>
+        <p:txBody>
+          <a:bodyPr wrap="none" lIns="0" tIns="0" rIns="0" bIns="0" rtlCol="0" anchor="t"/>
           <a:lstStyle/>
           <a:p>
             <a:pPr algn="l" indent="0" marL="0">
@@ -7844,7 +7844,7 @@
                 <a:ea typeface="Arial" pitchFamily="34" charset="-122"/>
                 <a:cs typeface="Arial" pitchFamily="34" charset="-120"/>
               </a:rPr>
-              <a:t>Sit anywhere. Open MindForge. Press Start.</a:t>
+              <a:t>MindForge is open. Play any time.</a:t>
             </a:r>
             <a:endParaRPr lang="en-US" sz="4800" dirty="0"/>
           </a:p>
@@ -7858,7 +7858,7 @@
         </p:nvSpPr>
         <p:spPr>
           <a:xfrm>
-            <a:off x="812780" y="2854849"/>
+            <a:off x="812780" y="2214805"/>
             <a:ext cx="3386549" cy="1499753"/>
           </a:xfrm>
           <a:prstGeom prst="roundRect">
@@ -7885,7 +7885,7 @@
         </p:nvSpPr>
         <p:spPr>
           <a:xfrm>
-            <a:off x="1073123" y="3115192"/>
+            <a:off x="1073123" y="2475148"/>
             <a:ext cx="3209765" cy="321262"/>
           </a:xfrm>
           <a:prstGeom prst="rect">
@@ -7927,7 +7927,7 @@
         </p:nvSpPr>
         <p:spPr>
           <a:xfrm>
-            <a:off x="1073123" y="3525352"/>
+            <a:off x="1073123" y="2885308"/>
             <a:ext cx="2966167" cy="568906"/>
           </a:xfrm>
           <a:prstGeom prst="rect">
@@ -7969,7 +7969,7 @@
         </p:nvSpPr>
         <p:spPr>
           <a:xfrm>
-            <a:off x="4402524" y="2854849"/>
+            <a:off x="4402524" y="2214805"/>
             <a:ext cx="3386549" cy="1499753"/>
           </a:xfrm>
           <a:prstGeom prst="roundRect">
@@ -7996,7 +7996,7 @@
         </p:nvSpPr>
         <p:spPr>
           <a:xfrm>
-            <a:off x="4662867" y="3115192"/>
+            <a:off x="4662867" y="2475148"/>
             <a:ext cx="3209765" cy="321262"/>
           </a:xfrm>
           <a:prstGeom prst="rect">
@@ -8038,7 +8038,7 @@
         </p:nvSpPr>
         <p:spPr>
           <a:xfrm>
-            <a:off x="4662867" y="3525352"/>
+            <a:off x="4662867" y="2885308"/>
             <a:ext cx="2966167" cy="568906"/>
           </a:xfrm>
           <a:prstGeom prst="rect">
@@ -8080,7 +8080,7 @@
         </p:nvSpPr>
         <p:spPr>
           <a:xfrm>
-            <a:off x="7992267" y="2854849"/>
+            <a:off x="7992267" y="2214805"/>
             <a:ext cx="3386549" cy="1499753"/>
           </a:xfrm>
           <a:prstGeom prst="roundRect">
@@ -8107,7 +8107,7 @@
         </p:nvSpPr>
         <p:spPr>
           <a:xfrm>
-            <a:off x="8252611" y="3115192"/>
+            <a:off x="8252611" y="2475148"/>
             <a:ext cx="3209765" cy="321262"/>
           </a:xfrm>
           <a:prstGeom prst="rect">
@@ -8149,7 +8149,7 @@
         </p:nvSpPr>
         <p:spPr>
           <a:xfrm>
-            <a:off x="8252611" y="3525352"/>
+            <a:off x="8252611" y="2885308"/>
             <a:ext cx="3209765" cy="284453"/>
           </a:xfrm>
           <a:prstGeom prst="rect">
@@ -13108,7 +13108,7 @@
                 <a:ea typeface="Arial" pitchFamily="34" charset="-122"/>
                 <a:cs typeface="Arial" pitchFamily="34" charset="-120"/>
               </a:rPr>
-              <a:t>Four parts. You drive the last one.</a:t>
+              <a:t>Three parts. You drive the last one.</a:t>
             </a:r>
             <a:endParaRPr lang="en-US" sz="4000" dirty="0"/>
           </a:p>
@@ -13123,11 +13123,11 @@
         <p:spPr>
           <a:xfrm>
             <a:off x="812780" y="2158946"/>
-            <a:ext cx="2527237" cy="2255384"/>
+            <a:ext cx="3420382" cy="1667429"/>
           </a:xfrm>
           <a:prstGeom prst="roundRect">
             <a:avLst>
-              <a:gd name="adj" fmla="val 5631"/>
+              <a:gd name="adj" fmla="val 7616"/>
             </a:avLst>
           </a:prstGeom>
           <a:solidFill>
@@ -13150,7 +13150,7 @@
         <p:spPr>
           <a:xfrm>
             <a:off x="1022324" y="2368491"/>
-            <a:ext cx="2361125" cy="196845"/>
+            <a:ext cx="3361447" cy="196845"/>
           </a:xfrm>
           <a:prstGeom prst="rect">
             <a:avLst/>
@@ -13171,13 +13171,13 @@
             <a:r>
               <a:rPr lang="en-US" sz="1400" b="1" dirty="0">
                 <a:solidFill>
-                  <a:srgbClr val="3CC7BD"/>
+                  <a:srgbClr val="8F9DFF"/>
                 </a:solidFill>
                 <a:latin typeface="Consolas" pitchFamily="34" charset="0"/>
                 <a:ea typeface="Consolas" pitchFamily="34" charset="-122"/>
                 <a:cs typeface="Consolas" pitchFamily="34" charset="-120"/>
               </a:rPr>
-              <a:t>00:00</a:t>
+              <a:t>00:03</a:t>
             </a:r>
             <a:endParaRPr lang="en-US" sz="1400" dirty="0"/>
           </a:p>
@@ -13192,7 +13192,7 @@
         <p:spPr>
           <a:xfrm>
             <a:off x="1022324" y="2654234"/>
-            <a:ext cx="2361125" cy="321262"/>
+            <a:ext cx="3361447" cy="321262"/>
           </a:xfrm>
           <a:prstGeom prst="rect">
             <a:avLst/>
@@ -13219,7 +13219,7 @@
                 <a:ea typeface="Arial" pitchFamily="34" charset="-122"/>
                 <a:cs typeface="Arial" pitchFamily="34" charset="-120"/>
               </a:rPr>
-              <a:t>MindForge</a:t>
+              <a:t>LoomSTEM</a:t>
             </a:r>
             <a:endParaRPr lang="en-US" sz="2200" dirty="0"/>
           </a:p>
@@ -13234,16 +13234,16 @@
         <p:spPr>
           <a:xfrm>
             <a:off x="1022324" y="3064394"/>
-            <a:ext cx="2181932" cy="533387"/>
-          </a:xfrm>
-          <a:prstGeom prst="rect">
-            <a:avLst/>
-          </a:prstGeom>
-          <a:noFill/>
-          <a:ln/>
-        </p:spPr>
-        <p:txBody>
-          <a:bodyPr wrap="square" lIns="0" tIns="0" rIns="0" bIns="0" rtlCol="0" anchor="t"/>
+            <a:ext cx="3361447" cy="266693"/>
+          </a:xfrm>
+          <a:prstGeom prst="rect">
+            <a:avLst/>
+          </a:prstGeom>
+          <a:noFill/>
+          <a:ln/>
+        </p:spPr>
+        <p:txBody>
+          <a:bodyPr wrap="none" lIns="0" tIns="0" rIns="0" bIns="0" rtlCol="0" anchor="t"/>
           <a:lstStyle/>
           <a:p>
             <a:pPr algn="l" indent="0" marL="0">
@@ -13261,7 +13261,7 @@
                 <a:ea typeface="Arial" pitchFamily="34" charset="-122"/>
                 <a:cs typeface="Arial" pitchFamily="34" charset="-120"/>
               </a:rPr>
-              <a:t>Brain teasers to get going</a:t>
+              <a:t>Build with blocks, together</a:t>
             </a:r>
             <a:endParaRPr lang="en-US" sz="1500" dirty="0"/>
           </a:p>
@@ -13275,8 +13275,8 @@
         </p:nvSpPr>
         <p:spPr>
           <a:xfrm>
-            <a:off x="1022324" y="3686678"/>
-            <a:ext cx="2361125" cy="196845"/>
+            <a:off x="1022324" y="3419985"/>
+            <a:ext cx="3361447" cy="196845"/>
           </a:xfrm>
           <a:prstGeom prst="rect">
             <a:avLst/>
@@ -13297,13 +13297,13 @@
             <a:r>
               <a:rPr lang="en-US" sz="1300" b="1" spc="100" kern="0" dirty="0">
                 <a:solidFill>
-                  <a:srgbClr val="3CC7BD"/>
-                </a:solidFill>
-                <a:latin typeface="Arial" pitchFamily="34" charset="0"/>
-                <a:ea typeface="Arial" pitchFamily="34" charset="-122"/>
-                <a:cs typeface="Arial" pitchFamily="34" charset="-120"/>
-              </a:rPr>
-              <a:t>OWN PACE</a:t>
+                  <a:srgbClr val="8F9DFF"/>
+                </a:solidFill>
+                <a:latin typeface="Arial" pitchFamily="34" charset="0"/>
+                <a:ea typeface="Arial" pitchFamily="34" charset="-122"/>
+                <a:cs typeface="Arial" pitchFamily="34" charset="-120"/>
+              </a:rPr>
+              <a:t>TOGETHER</a:t>
             </a:r>
             <a:endParaRPr lang="en-US" sz="1300" dirty="0"/>
           </a:p>
@@ -13317,12 +13317,12 @@
         </p:nvSpPr>
         <p:spPr>
           <a:xfrm>
-            <a:off x="3492413" y="2158946"/>
-            <a:ext cx="2527237" cy="2255384"/>
+            <a:off x="4385558" y="2158946"/>
+            <a:ext cx="3420481" cy="1667429"/>
           </a:xfrm>
           <a:prstGeom prst="roundRect">
             <a:avLst>
-              <a:gd name="adj" fmla="val 5631"/>
+              <a:gd name="adj" fmla="val 7616"/>
             </a:avLst>
           </a:prstGeom>
           <a:solidFill>
@@ -13344,8 +13344,8 @@
         </p:nvSpPr>
         <p:spPr>
           <a:xfrm>
-            <a:off x="3701957" y="2368491"/>
-            <a:ext cx="2361125" cy="196845"/>
+            <a:off x="4595102" y="2368491"/>
+            <a:ext cx="3361558" cy="196845"/>
           </a:xfrm>
           <a:prstGeom prst="rect">
             <a:avLst/>
@@ -13372,7 +13372,7 @@
                 <a:ea typeface="Consolas" pitchFamily="34" charset="-122"/>
                 <a:cs typeface="Consolas" pitchFamily="34" charset="-120"/>
               </a:rPr>
-              <a:t>00:11</a:t>
+              <a:t>00:27</a:t>
             </a:r>
             <a:endParaRPr lang="en-US" sz="1400" dirty="0"/>
           </a:p>
@@ -13386,8 +13386,8 @@
         </p:nvSpPr>
         <p:spPr>
           <a:xfrm>
-            <a:off x="3701957" y="2654234"/>
-            <a:ext cx="2361125" cy="321262"/>
+            <a:off x="4595102" y="2654234"/>
+            <a:ext cx="3361558" cy="321262"/>
           </a:xfrm>
           <a:prstGeom prst="rect">
             <a:avLst/>
@@ -13414,7 +13414,7 @@
                 <a:ea typeface="Arial" pitchFamily="34" charset="-122"/>
                 <a:cs typeface="Arial" pitchFamily="34" charset="-120"/>
               </a:rPr>
-              <a:t>LoomSTEM</a:t>
+              <a:t>The Vault</a:t>
             </a:r>
             <a:endParaRPr lang="en-US" sz="2200" dirty="0"/>
           </a:p>
@@ -13428,17 +13428,17 @@
         </p:nvSpPr>
         <p:spPr>
           <a:xfrm>
-            <a:off x="3701957" y="3064394"/>
-            <a:ext cx="2181932" cy="533387"/>
-          </a:xfrm>
-          <a:prstGeom prst="rect">
-            <a:avLst/>
-          </a:prstGeom>
-          <a:noFill/>
-          <a:ln/>
-        </p:spPr>
-        <p:txBody>
-          <a:bodyPr wrap="square" lIns="0" tIns="0" rIns="0" bIns="0" rtlCol="0" anchor="t"/>
+            <a:off x="4595102" y="3064394"/>
+            <a:ext cx="3361558" cy="266693"/>
+          </a:xfrm>
+          <a:prstGeom prst="rect">
+            <a:avLst/>
+          </a:prstGeom>
+          <a:noFill/>
+          <a:ln/>
+        </p:spPr>
+        <p:txBody>
+          <a:bodyPr wrap="none" lIns="0" tIns="0" rIns="0" bIns="0" rtlCol="0" anchor="t"/>
           <a:lstStyle/>
           <a:p>
             <a:pPr algn="l" indent="0" marL="0">
@@ -13456,7 +13456,7 @@
                 <a:ea typeface="Arial" pitchFamily="34" charset="-122"/>
                 <a:cs typeface="Arial" pitchFamily="34" charset="-120"/>
               </a:rPr>
-              <a:t>Build with blocks, together</a:t>
+              <a:t>A heist you code your way out of</a:t>
             </a:r>
             <a:endParaRPr lang="en-US" sz="1500" dirty="0"/>
           </a:p>
@@ -13470,8 +13470,8 @@
         </p:nvSpPr>
         <p:spPr>
           <a:xfrm>
-            <a:off x="3701957" y="3686678"/>
-            <a:ext cx="2361125" cy="196845"/>
+            <a:off x="4595102" y="3419985"/>
+            <a:ext cx="3361558" cy="196845"/>
           </a:xfrm>
           <a:prstGeom prst="rect">
             <a:avLst/>
@@ -13512,12 +13512,12 @@
         </p:nvSpPr>
         <p:spPr>
           <a:xfrm>
-            <a:off x="6172046" y="2158946"/>
-            <a:ext cx="2527237" cy="2255384"/>
+            <a:off x="7958435" y="2158946"/>
+            <a:ext cx="3420481" cy="1667429"/>
           </a:xfrm>
           <a:prstGeom prst="roundRect">
             <a:avLst>
-              <a:gd name="adj" fmla="val 5631"/>
+              <a:gd name="adj" fmla="val 7616"/>
             </a:avLst>
           </a:prstGeom>
           <a:solidFill>
@@ -13539,8 +13539,8 @@
         </p:nvSpPr>
         <p:spPr>
           <a:xfrm>
-            <a:off x="6381590" y="2368491"/>
-            <a:ext cx="2361125" cy="196845"/>
+            <a:off x="8167979" y="2368491"/>
+            <a:ext cx="3361558" cy="196845"/>
           </a:xfrm>
           <a:prstGeom prst="rect">
             <a:avLst/>
@@ -13561,13 +13561,13 @@
             <a:r>
               <a:rPr lang="en-US" sz="1400" b="1" dirty="0">
                 <a:solidFill>
-                  <a:srgbClr val="8F9DFF"/>
+                  <a:srgbClr val="3CC7BD"/>
                 </a:solidFill>
                 <a:latin typeface="Consolas" pitchFamily="34" charset="0"/>
                 <a:ea typeface="Consolas" pitchFamily="34" charset="-122"/>
                 <a:cs typeface="Consolas" pitchFamily="34" charset="-120"/>
               </a:rPr>
-              <a:t>00:35</a:t>
+              <a:t>01:01</a:t>
             </a:r>
             <a:endParaRPr lang="en-US" sz="1400" dirty="0"/>
           </a:p>
@@ -13581,8 +13581,8 @@
         </p:nvSpPr>
         <p:spPr>
           <a:xfrm>
-            <a:off x="6381590" y="2654234"/>
-            <a:ext cx="2361125" cy="321262"/>
+            <a:off x="8167979" y="2654234"/>
+            <a:ext cx="3361558" cy="321262"/>
           </a:xfrm>
           <a:prstGeom prst="rect">
             <a:avLst/>
@@ -13609,7 +13609,7 @@
                 <a:ea typeface="Arial" pitchFamily="34" charset="-122"/>
                 <a:cs typeface="Arial" pitchFamily="34" charset="-120"/>
               </a:rPr>
-              <a:t>The Vault</a:t>
+              <a:t>Compound Click</a:t>
             </a:r>
             <a:endParaRPr lang="en-US" sz="2200" dirty="0"/>
           </a:p>
@@ -13623,17 +13623,17 @@
         </p:nvSpPr>
         <p:spPr>
           <a:xfrm>
-            <a:off x="6381590" y="3064394"/>
-            <a:ext cx="2181932" cy="533387"/>
-          </a:xfrm>
-          <a:prstGeom prst="rect">
-            <a:avLst/>
-          </a:prstGeom>
-          <a:noFill/>
-          <a:ln/>
-        </p:spPr>
-        <p:txBody>
-          <a:bodyPr wrap="square" lIns="0" tIns="0" rIns="0" bIns="0" rtlCol="0" anchor="t"/>
+            <a:off x="8167979" y="3064394"/>
+            <a:ext cx="3361558" cy="266693"/>
+          </a:xfrm>
+          <a:prstGeom prst="rect">
+            <a:avLst/>
+          </a:prstGeom>
+          <a:noFill/>
+          <a:ln/>
+        </p:spPr>
+        <p:txBody>
+          <a:bodyPr wrap="none" lIns="0" tIns="0" rIns="0" bIns="0" rtlCol="0" anchor="t"/>
           <a:lstStyle/>
           <a:p>
             <a:pPr algn="l" indent="0" marL="0">
@@ -13651,7 +13651,7 @@
                 <a:ea typeface="Arial" pitchFamily="34" charset="-122"/>
                 <a:cs typeface="Arial" pitchFamily="34" charset="-120"/>
               </a:rPr>
-              <a:t>A heist you code your way out of</a:t>
+              <a:t>Build your own small app</a:t>
             </a:r>
             <a:endParaRPr lang="en-US" sz="1500" dirty="0"/>
           </a:p>
@@ -13665,8 +13665,8 @@
         </p:nvSpPr>
         <p:spPr>
           <a:xfrm>
-            <a:off x="6381590" y="3686678"/>
-            <a:ext cx="2361125" cy="196845"/>
+            <a:off x="8167979" y="3419985"/>
+            <a:ext cx="3361558" cy="196845"/>
           </a:xfrm>
           <a:prstGeom prst="rect">
             <a:avLst/>
@@ -13687,13 +13687,13 @@
             <a:r>
               <a:rPr lang="en-US" sz="1300" b="1" spc="100" kern="0" dirty="0">
                 <a:solidFill>
-                  <a:srgbClr val="8F9DFF"/>
-                </a:solidFill>
-                <a:latin typeface="Arial" pitchFamily="34" charset="0"/>
-                <a:ea typeface="Arial" pitchFamily="34" charset="-122"/>
-                <a:cs typeface="Arial" pitchFamily="34" charset="-120"/>
-              </a:rPr>
-              <a:t>TOGETHER</a:t>
+                  <a:srgbClr val="3CC7BD"/>
+                </a:solidFill>
+                <a:latin typeface="Arial" pitchFamily="34" charset="0"/>
+                <a:ea typeface="Arial" pitchFamily="34" charset="-122"/>
+                <a:cs typeface="Arial" pitchFamily="34" charset="-120"/>
+              </a:rPr>
+              <a:t>OWN PACE</a:t>
             </a:r>
             <a:endParaRPr lang="en-US" sz="1300" dirty="0"/>
           </a:p>
@@ -13701,209 +13701,14 @@
       </p:sp>
       <p:sp>
         <p:nvSpPr>
-          <p:cNvPr id="19" name="Shape 17"/>
-          <p:cNvSpPr/>
-          <p:nvPr/>
-        </p:nvSpPr>
-        <p:spPr>
-          <a:xfrm>
-            <a:off x="8851679" y="2158946"/>
-            <a:ext cx="2527237" cy="2255384"/>
-          </a:xfrm>
-          <a:prstGeom prst="roundRect">
-            <a:avLst>
-              <a:gd name="adj" fmla="val 5631"/>
-            </a:avLst>
-          </a:prstGeom>
-          <a:solidFill>
-            <a:srgbClr val="16222D"/>
-          </a:solidFill>
-          <a:ln w="6350">
-            <a:solidFill>
-              <a:srgbClr val="26384A"/>
-            </a:solidFill>
-            <a:prstDash val="solid"/>
-          </a:ln>
-        </p:spPr>
-      </p:sp>
-      <p:sp>
-        <p:nvSpPr>
-          <p:cNvPr id="20" name="Text 18"/>
-          <p:cNvSpPr/>
-          <p:nvPr/>
-        </p:nvSpPr>
-        <p:spPr>
-          <a:xfrm>
-            <a:off x="9061223" y="2368491"/>
-            <a:ext cx="2361125" cy="196845"/>
-          </a:xfrm>
-          <a:prstGeom prst="rect">
-            <a:avLst/>
-          </a:prstGeom>
-          <a:noFill/>
-          <a:ln/>
-        </p:spPr>
-        <p:txBody>
-          <a:bodyPr wrap="none" lIns="0" tIns="0" rIns="0" bIns="0" rtlCol="0" anchor="t"/>
-          <a:lstStyle/>
-          <a:p>
-            <a:pPr algn="l" indent="0" marL="0">
-              <a:lnSpc>
-                <a:spcPts val="1820"/>
-              </a:lnSpc>
-              <a:buNone/>
-            </a:pPr>
-            <a:r>
-              <a:rPr lang="en-US" sz="1400" b="1" dirty="0">
-                <a:solidFill>
-                  <a:srgbClr val="3CC7BD"/>
-                </a:solidFill>
-                <a:latin typeface="Consolas" pitchFamily="34" charset="0"/>
-                <a:ea typeface="Consolas" pitchFamily="34" charset="-122"/>
-                <a:cs typeface="Consolas" pitchFamily="34" charset="-120"/>
-              </a:rPr>
-              <a:t>01:09</a:t>
-            </a:r>
-            <a:endParaRPr lang="en-US" sz="1400" dirty="0"/>
-          </a:p>
-        </p:txBody>
-      </p:sp>
-      <p:sp>
-        <p:nvSpPr>
-          <p:cNvPr id="21" name="Text 19"/>
-          <p:cNvSpPr/>
-          <p:nvPr/>
-        </p:nvSpPr>
-        <p:spPr>
-          <a:xfrm>
-            <a:off x="9061223" y="2654234"/>
-            <a:ext cx="2181932" cy="642525"/>
-          </a:xfrm>
-          <a:prstGeom prst="rect">
-            <a:avLst/>
-          </a:prstGeom>
-          <a:noFill/>
-          <a:ln/>
-        </p:spPr>
-        <p:txBody>
-          <a:bodyPr wrap="square" lIns="0" tIns="0" rIns="0" bIns="0" rtlCol="0" anchor="t"/>
-          <a:lstStyle/>
-          <a:p>
-            <a:pPr algn="l" indent="0" marL="0">
-              <a:lnSpc>
-                <a:spcPts val="2530"/>
-              </a:lnSpc>
-              <a:buNone/>
-            </a:pPr>
-            <a:r>
-              <a:rPr lang="en-US" sz="2200" b="1" dirty="0">
-                <a:solidFill>
-                  <a:srgbClr val="EEF2F6"/>
-                </a:solidFill>
-                <a:latin typeface="Arial" pitchFamily="34" charset="0"/>
-                <a:ea typeface="Arial" pitchFamily="34" charset="-122"/>
-                <a:cs typeface="Arial" pitchFamily="34" charset="-120"/>
-              </a:rPr>
-              <a:t>Compound Click</a:t>
-            </a:r>
-            <a:endParaRPr lang="en-US" sz="2200" dirty="0"/>
-          </a:p>
-        </p:txBody>
-      </p:sp>
-      <p:sp>
-        <p:nvSpPr>
-          <p:cNvPr id="22" name="Text 20"/>
-          <p:cNvSpPr/>
-          <p:nvPr/>
-        </p:nvSpPr>
-        <p:spPr>
-          <a:xfrm>
-            <a:off x="9061223" y="3385656"/>
-            <a:ext cx="2181932" cy="533387"/>
-          </a:xfrm>
-          <a:prstGeom prst="rect">
-            <a:avLst/>
-          </a:prstGeom>
-          <a:noFill/>
-          <a:ln/>
-        </p:spPr>
-        <p:txBody>
-          <a:bodyPr wrap="square" lIns="0" tIns="0" rIns="0" bIns="0" rtlCol="0" anchor="t"/>
-          <a:lstStyle/>
-          <a:p>
-            <a:pPr algn="l" indent="0" marL="0">
-              <a:lnSpc>
-                <a:spcPts val="2100"/>
-              </a:lnSpc>
-              <a:buNone/>
-            </a:pPr>
-            <a:r>
-              <a:rPr lang="en-US" sz="1500" dirty="0">
-                <a:solidFill>
-                  <a:srgbClr val="B7C4D1"/>
-                </a:solidFill>
-                <a:latin typeface="Arial" pitchFamily="34" charset="0"/>
-                <a:ea typeface="Arial" pitchFamily="34" charset="-122"/>
-                <a:cs typeface="Arial" pitchFamily="34" charset="-120"/>
-              </a:rPr>
-              <a:t>Build your own small app</a:t>
-            </a:r>
-            <a:endParaRPr lang="en-US" sz="1500" dirty="0"/>
-          </a:p>
-        </p:txBody>
-      </p:sp>
-      <p:sp>
-        <p:nvSpPr>
-          <p:cNvPr id="23" name="Text 21"/>
-          <p:cNvSpPr/>
-          <p:nvPr/>
-        </p:nvSpPr>
-        <p:spPr>
-          <a:xfrm>
-            <a:off x="9061223" y="4007940"/>
-            <a:ext cx="2361125" cy="196845"/>
-          </a:xfrm>
-          <a:prstGeom prst="rect">
-            <a:avLst/>
-          </a:prstGeom>
-          <a:noFill/>
-          <a:ln/>
-        </p:spPr>
-        <p:txBody>
-          <a:bodyPr wrap="none" lIns="0" tIns="0" rIns="0" bIns="0" rtlCol="0" anchor="t"/>
-          <a:lstStyle/>
-          <a:p>
-            <a:pPr algn="l" indent="0" marL="0">
-              <a:lnSpc>
-                <a:spcPts val="1690"/>
-              </a:lnSpc>
-              <a:buNone/>
-            </a:pPr>
-            <a:r>
-              <a:rPr lang="en-US" sz="1300" b="1" spc="100" kern="0" dirty="0">
-                <a:solidFill>
-                  <a:srgbClr val="3CC7BD"/>
-                </a:solidFill>
-                <a:latin typeface="Arial" pitchFamily="34" charset="0"/>
-                <a:ea typeface="Arial" pitchFamily="34" charset="-122"/>
-                <a:cs typeface="Arial" pitchFamily="34" charset="-120"/>
-              </a:rPr>
-              <a:t>OWN PACE</a:t>
-            </a:r>
-            <a:endParaRPr lang="en-US" sz="1300" dirty="0"/>
-          </a:p>
-        </p:txBody>
-      </p:sp>
-      <p:sp>
-        <p:nvSpPr>
-          <p:cNvPr id="24" name="Text 22"/>
+          <p:cNvPr id="19" name="Text 17"/>
           <p:cNvSpPr/>
           <p:nvPr/>
         </p:nvSpPr>
         <p:spPr>
           <a:xfrm>
             <a:off x="812780" y="6273643"/>
-            <a:ext cx="3380338" cy="177796"/>
+            <a:ext cx="6368970" cy="177796"/>
           </a:xfrm>
           <a:prstGeom prst="rect">
             <a:avLst/>
@@ -13930,7 +13735,7 @@
                 <a:ea typeface="Arial" pitchFamily="34" charset="-122"/>
                 <a:cs typeface="Arial" pitchFamily="34" charset="-120"/>
               </a:rPr>
-              <a:t>Times shown for the 90-minute Core session</a:t>
+              <a:t>Times shown for the 82-minute Core session. MindForge runs all afternoon before it.</a:t>
             </a:r>
             <a:endParaRPr lang="en-US" sz="1200" dirty="0"/>
           </a:p>
